--- a/VLearn_Pitch_Deck (2).pptx
+++ b/VLearn_Pitch_Deck (2).pptx
@@ -1,19 +1,19 @@
 
 <file path=ppt/presentation.xml><?xml version="1.0" encoding="utf-8"?>
-<p:presentation xmlns:a="http://schemas.openxmlformats.org/drawingml/2006/main" xmlns:r="http://schemas.openxmlformats.org/officeDocument/2006/relationships" xmlns:p="http://schemas.openxmlformats.org/presentationml/2006/main" saveSubsetFonts="1" autoCompressPictures="0">
+<p:presentation xmlns:a="http://schemas.openxmlformats.org/drawingml/2006/main" xmlns:r="http://schemas.openxmlformats.org/officeDocument/2006/relationships" xmlns:p="http://schemas.openxmlformats.org/presentationml/2006/main" autoCompressPictures="0">
   <p:sldMasterIdLst>
     <p:sldMasterId id="2147483648" r:id="rId1"/>
   </p:sldMasterIdLst>
   <p:sldIdLst>
-    <p:sldId id="256" r:id="rId7"/>
-    <p:sldId id="257" r:id="rId8"/>
-    <p:sldId id="258" r:id="rId9"/>
-    <p:sldId id="259" r:id="rId10"/>
-    <p:sldId id="260" r:id="rId11"/>
-    <p:sldId id="261" r:id="rId12"/>
-    <p:sldId id="262" r:id="rId13"/>
+    <p:sldId id="256" r:id="rId3"/>
+    <p:sldId id="257" r:id="rId4"/>
+    <p:sldId id="258" r:id="rId5"/>
+    <p:sldId id="259" r:id="rId6"/>
+    <p:sldId id="260" r:id="rId7"/>
+    <p:sldId id="261" r:id="rId8"/>
+    <p:sldId id="262" r:id="rId9"/>
   </p:sldIdLst>
-  <p:sldSz cx="12191695" cy="6858000" type="screen4x3"/>
+  <p:sldSz cx="12191365" cy="6858000" type="screen4x3"/>
   <p:notesSz cx="6858000" cy="9144000"/>
   <p:defaultTextStyle>
     <a:defPPr>
@@ -110,6 +110,22 @@
       </a:defRPr>
     </a:lvl9pPr>
   </p:defaultTextStyle>
+  <p:extLst>
+    <p:ext uri="{EFAFB233-063F-42B5-8137-9DF3F51BA10A}">
+      <p15:sldGuideLst xmlns:p15="http://schemas.microsoft.com/office/powerpoint/2012/main">
+        <p15:guide id="1" orient="horz" pos="2160" userDrawn="1">
+          <p15:clr>
+            <a:srgbClr val="A4A3A4"/>
+          </p15:clr>
+        </p15:guide>
+        <p15:guide id="2" pos="2880" userDrawn="1">
+          <p15:clr>
+            <a:srgbClr val="A4A3A4"/>
+          </p15:clr>
+        </p15:guide>
+      </p15:sldGuideLst>
+    </p:ext>
+  </p:extLst>
 </p:presentation>
 </file>
 
@@ -294,7 +310,6 @@
           <a:p>
             <a:fld id="{5BCAD085-E8A6-8845-BD4E-CB4CCA059FC4}" type="datetimeFigureOut">
               <a:rPr lang="en-US" smtClean="0"/>
-              <a:t>1/27/13</a:t>
             </a:fld>
             <a:endParaRPr lang="en-US"/>
           </a:p>
@@ -336,18 +351,12 @@
           <a:p>
             <a:fld id="{C1FF6DA9-008F-8B48-92A6-B652298478BF}" type="slidenum">
               <a:rPr lang="en-US" smtClean="0"/>
-              <a:t>‹#›</a:t>
             </a:fld>
             <a:endParaRPr lang="en-US"/>
           </a:p>
         </p:txBody>
       </p:sp>
     </p:spTree>
-    <p:extLst>
-      <p:ext uri="{BB962C8B-B14F-4D97-AF65-F5344CB8AC3E}">
-        <p14:creationId xmlns:p14="http://schemas.microsoft.com/office/powerpoint/2010/main" val="3168075583"/>
-      </p:ext>
-    </p:extLst>
   </p:cSld>
   <p:clrMapOvr>
     <a:masterClrMapping/>
@@ -415,6 +424,7 @@
               <a:rPr lang="en-US" smtClean="0"/>
               <a:t>Click to edit Master text styles</a:t>
             </a:r>
+            <a:endParaRPr lang="en-US" smtClean="0"/>
           </a:p>
           <a:p>
             <a:pPr lvl="1"/>
@@ -422,6 +432,7 @@
               <a:rPr lang="en-US" smtClean="0"/>
               <a:t>Second level</a:t>
             </a:r>
+            <a:endParaRPr lang="en-US" smtClean="0"/>
           </a:p>
           <a:p>
             <a:pPr lvl="2"/>
@@ -429,6 +440,7 @@
               <a:rPr lang="en-US" smtClean="0"/>
               <a:t>Third level</a:t>
             </a:r>
+            <a:endParaRPr lang="en-US" smtClean="0"/>
           </a:p>
           <a:p>
             <a:pPr lvl="3"/>
@@ -436,6 +448,7 @@
               <a:rPr lang="en-US" smtClean="0"/>
               <a:t>Fourth level</a:t>
             </a:r>
+            <a:endParaRPr lang="en-US" smtClean="0"/>
           </a:p>
           <a:p>
             <a:pPr lvl="4"/>
@@ -464,7 +477,6 @@
           <a:p>
             <a:fld id="{5BCAD085-E8A6-8845-BD4E-CB4CCA059FC4}" type="datetimeFigureOut">
               <a:rPr lang="en-US" smtClean="0"/>
-              <a:t>1/27/13</a:t>
             </a:fld>
             <a:endParaRPr lang="en-US"/>
           </a:p>
@@ -506,18 +518,12 @@
           <a:p>
             <a:fld id="{C1FF6DA9-008F-8B48-92A6-B652298478BF}" type="slidenum">
               <a:rPr lang="en-US" smtClean="0"/>
-              <a:t>‹#›</a:t>
             </a:fld>
             <a:endParaRPr lang="en-US"/>
           </a:p>
         </p:txBody>
       </p:sp>
     </p:spTree>
-    <p:extLst>
-      <p:ext uri="{BB962C8B-B14F-4D97-AF65-F5344CB8AC3E}">
-        <p14:creationId xmlns:p14="http://schemas.microsoft.com/office/powerpoint/2010/main" val="2910927964"/>
-      </p:ext>
-    </p:extLst>
   </p:cSld>
   <p:clrMapOvr>
     <a:masterClrMapping/>
@@ -595,6 +601,7 @@
               <a:rPr lang="en-US" smtClean="0"/>
               <a:t>Click to edit Master text styles</a:t>
             </a:r>
+            <a:endParaRPr lang="en-US" smtClean="0"/>
           </a:p>
           <a:p>
             <a:pPr lvl="1"/>
@@ -602,6 +609,7 @@
               <a:rPr lang="en-US" smtClean="0"/>
               <a:t>Second level</a:t>
             </a:r>
+            <a:endParaRPr lang="en-US" smtClean="0"/>
           </a:p>
           <a:p>
             <a:pPr lvl="2"/>
@@ -609,6 +617,7 @@
               <a:rPr lang="en-US" smtClean="0"/>
               <a:t>Third level</a:t>
             </a:r>
+            <a:endParaRPr lang="en-US" smtClean="0"/>
           </a:p>
           <a:p>
             <a:pPr lvl="3"/>
@@ -616,6 +625,7 @@
               <a:rPr lang="en-US" smtClean="0"/>
               <a:t>Fourth level</a:t>
             </a:r>
+            <a:endParaRPr lang="en-US" smtClean="0"/>
           </a:p>
           <a:p>
             <a:pPr lvl="4"/>
@@ -644,7 +654,6 @@
           <a:p>
             <a:fld id="{5BCAD085-E8A6-8845-BD4E-CB4CCA059FC4}" type="datetimeFigureOut">
               <a:rPr lang="en-US" smtClean="0"/>
-              <a:t>1/27/13</a:t>
             </a:fld>
             <a:endParaRPr lang="en-US"/>
           </a:p>
@@ -686,18 +695,12 @@
           <a:p>
             <a:fld id="{C1FF6DA9-008F-8B48-92A6-B652298478BF}" type="slidenum">
               <a:rPr lang="en-US" smtClean="0"/>
-              <a:t>‹#›</a:t>
             </a:fld>
             <a:endParaRPr lang="en-US"/>
           </a:p>
         </p:txBody>
       </p:sp>
     </p:spTree>
-    <p:extLst>
-      <p:ext uri="{BB962C8B-B14F-4D97-AF65-F5344CB8AC3E}">
-        <p14:creationId xmlns:p14="http://schemas.microsoft.com/office/powerpoint/2010/main" val="3612223792"/>
-      </p:ext>
-    </p:extLst>
   </p:cSld>
   <p:clrMapOvr>
     <a:masterClrMapping/>
@@ -765,6 +768,7 @@
               <a:rPr lang="en-US" smtClean="0"/>
               <a:t>Click to edit Master text styles</a:t>
             </a:r>
+            <a:endParaRPr lang="en-US" smtClean="0"/>
           </a:p>
           <a:p>
             <a:pPr lvl="1"/>
@@ -772,6 +776,7 @@
               <a:rPr lang="en-US" smtClean="0"/>
               <a:t>Second level</a:t>
             </a:r>
+            <a:endParaRPr lang="en-US" smtClean="0"/>
           </a:p>
           <a:p>
             <a:pPr lvl="2"/>
@@ -779,6 +784,7 @@
               <a:rPr lang="en-US" smtClean="0"/>
               <a:t>Third level</a:t>
             </a:r>
+            <a:endParaRPr lang="en-US" smtClean="0"/>
           </a:p>
           <a:p>
             <a:pPr lvl="3"/>
@@ -786,6 +792,7 @@
               <a:rPr lang="en-US" smtClean="0"/>
               <a:t>Fourth level</a:t>
             </a:r>
+            <a:endParaRPr lang="en-US" smtClean="0"/>
           </a:p>
           <a:p>
             <a:pPr lvl="4"/>
@@ -814,7 +821,6 @@
           <a:p>
             <a:fld id="{5BCAD085-E8A6-8845-BD4E-CB4CCA059FC4}" type="datetimeFigureOut">
               <a:rPr lang="en-US" smtClean="0"/>
-              <a:t>1/27/13</a:t>
             </a:fld>
             <a:endParaRPr lang="en-US"/>
           </a:p>
@@ -856,18 +862,12 @@
           <a:p>
             <a:fld id="{C1FF6DA9-008F-8B48-92A6-B652298478BF}" type="slidenum">
               <a:rPr lang="en-US" smtClean="0"/>
-              <a:t>‹#›</a:t>
             </a:fld>
             <a:endParaRPr lang="en-US"/>
           </a:p>
         </p:txBody>
       </p:sp>
     </p:spTree>
-    <p:extLst>
-      <p:ext uri="{BB962C8B-B14F-4D97-AF65-F5344CB8AC3E}">
-        <p14:creationId xmlns:p14="http://schemas.microsoft.com/office/powerpoint/2010/main" val="2614314258"/>
-      </p:ext>
-    </p:extLst>
   </p:cSld>
   <p:clrMapOvr>
     <a:masterClrMapping/>
@@ -1040,6 +1040,7 @@
               <a:rPr lang="en-US" smtClean="0"/>
               <a:t>Click to edit Master text styles</a:t>
             </a:r>
+            <a:endParaRPr lang="en-US" smtClean="0"/>
           </a:p>
         </p:txBody>
       </p:sp>
@@ -1060,7 +1061,6 @@
           <a:p>
             <a:fld id="{5BCAD085-E8A6-8845-BD4E-CB4CCA059FC4}" type="datetimeFigureOut">
               <a:rPr lang="en-US" smtClean="0"/>
-              <a:t>1/27/13</a:t>
             </a:fld>
             <a:endParaRPr lang="en-US"/>
           </a:p>
@@ -1102,18 +1102,12 @@
           <a:p>
             <a:fld id="{C1FF6DA9-008F-8B48-92A6-B652298478BF}" type="slidenum">
               <a:rPr lang="en-US" smtClean="0"/>
-              <a:t>‹#›</a:t>
             </a:fld>
             <a:endParaRPr lang="en-US"/>
           </a:p>
         </p:txBody>
       </p:sp>
     </p:spTree>
-    <p:extLst>
-      <p:ext uri="{BB962C8B-B14F-4D97-AF65-F5344CB8AC3E}">
-        <p14:creationId xmlns:p14="http://schemas.microsoft.com/office/powerpoint/2010/main" val="960648375"/>
-      </p:ext>
-    </p:extLst>
   </p:cSld>
   <p:clrMapOvr>
     <a:masterClrMapping/>
@@ -1214,6 +1208,7 @@
               <a:rPr lang="en-US" smtClean="0"/>
               <a:t>Click to edit Master text styles</a:t>
             </a:r>
+            <a:endParaRPr lang="en-US" smtClean="0"/>
           </a:p>
           <a:p>
             <a:pPr lvl="1"/>
@@ -1221,6 +1216,7 @@
               <a:rPr lang="en-US" smtClean="0"/>
               <a:t>Second level</a:t>
             </a:r>
+            <a:endParaRPr lang="en-US" smtClean="0"/>
           </a:p>
           <a:p>
             <a:pPr lvl="2"/>
@@ -1228,6 +1224,7 @@
               <a:rPr lang="en-US" smtClean="0"/>
               <a:t>Third level</a:t>
             </a:r>
+            <a:endParaRPr lang="en-US" smtClean="0"/>
           </a:p>
           <a:p>
             <a:pPr lvl="3"/>
@@ -1235,6 +1232,7 @@
               <a:rPr lang="en-US" smtClean="0"/>
               <a:t>Fourth level</a:t>
             </a:r>
+            <a:endParaRPr lang="en-US" smtClean="0"/>
           </a:p>
           <a:p>
             <a:pPr lvl="4"/>
@@ -1299,6 +1297,7 @@
               <a:rPr lang="en-US" smtClean="0"/>
               <a:t>Click to edit Master text styles</a:t>
             </a:r>
+            <a:endParaRPr lang="en-US" smtClean="0"/>
           </a:p>
           <a:p>
             <a:pPr lvl="1"/>
@@ -1306,6 +1305,7 @@
               <a:rPr lang="en-US" smtClean="0"/>
               <a:t>Second level</a:t>
             </a:r>
+            <a:endParaRPr lang="en-US" smtClean="0"/>
           </a:p>
           <a:p>
             <a:pPr lvl="2"/>
@@ -1313,6 +1313,7 @@
               <a:rPr lang="en-US" smtClean="0"/>
               <a:t>Third level</a:t>
             </a:r>
+            <a:endParaRPr lang="en-US" smtClean="0"/>
           </a:p>
           <a:p>
             <a:pPr lvl="3"/>
@@ -1320,6 +1321,7 @@
               <a:rPr lang="en-US" smtClean="0"/>
               <a:t>Fourth level</a:t>
             </a:r>
+            <a:endParaRPr lang="en-US" smtClean="0"/>
           </a:p>
           <a:p>
             <a:pPr lvl="4"/>
@@ -1348,7 +1350,6 @@
           <a:p>
             <a:fld id="{5BCAD085-E8A6-8845-BD4E-CB4CCA059FC4}" type="datetimeFigureOut">
               <a:rPr lang="en-US" smtClean="0"/>
-              <a:t>1/27/13</a:t>
             </a:fld>
             <a:endParaRPr lang="en-US"/>
           </a:p>
@@ -1390,18 +1391,12 @@
           <a:p>
             <a:fld id="{C1FF6DA9-008F-8B48-92A6-B652298478BF}" type="slidenum">
               <a:rPr lang="en-US" smtClean="0"/>
-              <a:t>‹#›</a:t>
             </a:fld>
             <a:endParaRPr lang="en-US"/>
           </a:p>
         </p:txBody>
       </p:sp>
     </p:spTree>
-    <p:extLst>
-      <p:ext uri="{BB962C8B-B14F-4D97-AF65-F5344CB8AC3E}">
-        <p14:creationId xmlns:p14="http://schemas.microsoft.com/office/powerpoint/2010/main" val="2782244947"/>
-      </p:ext>
-    </p:extLst>
   </p:cSld>
   <p:clrMapOvr>
     <a:masterClrMapping/>
@@ -1515,6 +1510,7 @@
               <a:rPr lang="en-US" smtClean="0"/>
               <a:t>Click to edit Master text styles</a:t>
             </a:r>
+            <a:endParaRPr lang="en-US" smtClean="0"/>
           </a:p>
         </p:txBody>
       </p:sp>
@@ -1571,6 +1567,7 @@
               <a:rPr lang="en-US" smtClean="0"/>
               <a:t>Click to edit Master text styles</a:t>
             </a:r>
+            <a:endParaRPr lang="en-US" smtClean="0"/>
           </a:p>
           <a:p>
             <a:pPr lvl="1"/>
@@ -1578,6 +1575,7 @@
               <a:rPr lang="en-US" smtClean="0"/>
               <a:t>Second level</a:t>
             </a:r>
+            <a:endParaRPr lang="en-US" smtClean="0"/>
           </a:p>
           <a:p>
             <a:pPr lvl="2"/>
@@ -1585,6 +1583,7 @@
               <a:rPr lang="en-US" smtClean="0"/>
               <a:t>Third level</a:t>
             </a:r>
+            <a:endParaRPr lang="en-US" smtClean="0"/>
           </a:p>
           <a:p>
             <a:pPr lvl="3"/>
@@ -1592,6 +1591,7 @@
               <a:rPr lang="en-US" smtClean="0"/>
               <a:t>Fourth level</a:t>
             </a:r>
+            <a:endParaRPr lang="en-US" smtClean="0"/>
           </a:p>
           <a:p>
             <a:pPr lvl="4"/>
@@ -1665,6 +1665,7 @@
               <a:rPr lang="en-US" smtClean="0"/>
               <a:t>Click to edit Master text styles</a:t>
             </a:r>
+            <a:endParaRPr lang="en-US" smtClean="0"/>
           </a:p>
         </p:txBody>
       </p:sp>
@@ -1721,6 +1722,7 @@
               <a:rPr lang="en-US" smtClean="0"/>
               <a:t>Click to edit Master text styles</a:t>
             </a:r>
+            <a:endParaRPr lang="en-US" smtClean="0"/>
           </a:p>
           <a:p>
             <a:pPr lvl="1"/>
@@ -1728,6 +1730,7 @@
               <a:rPr lang="en-US" smtClean="0"/>
               <a:t>Second level</a:t>
             </a:r>
+            <a:endParaRPr lang="en-US" smtClean="0"/>
           </a:p>
           <a:p>
             <a:pPr lvl="2"/>
@@ -1735,6 +1738,7 @@
               <a:rPr lang="en-US" smtClean="0"/>
               <a:t>Third level</a:t>
             </a:r>
+            <a:endParaRPr lang="en-US" smtClean="0"/>
           </a:p>
           <a:p>
             <a:pPr lvl="3"/>
@@ -1742,6 +1746,7 @@
               <a:rPr lang="en-US" smtClean="0"/>
               <a:t>Fourth level</a:t>
             </a:r>
+            <a:endParaRPr lang="en-US" smtClean="0"/>
           </a:p>
           <a:p>
             <a:pPr lvl="4"/>
@@ -1770,7 +1775,6 @@
           <a:p>
             <a:fld id="{5BCAD085-E8A6-8845-BD4E-CB4CCA059FC4}" type="datetimeFigureOut">
               <a:rPr lang="en-US" smtClean="0"/>
-              <a:t>1/27/13</a:t>
             </a:fld>
             <a:endParaRPr lang="en-US"/>
           </a:p>
@@ -1812,18 +1816,12 @@
           <a:p>
             <a:fld id="{C1FF6DA9-008F-8B48-92A6-B652298478BF}" type="slidenum">
               <a:rPr lang="en-US" smtClean="0"/>
-              <a:t>‹#›</a:t>
             </a:fld>
             <a:endParaRPr lang="en-US"/>
           </a:p>
         </p:txBody>
       </p:sp>
     </p:spTree>
-    <p:extLst>
-      <p:ext uri="{BB962C8B-B14F-4D97-AF65-F5344CB8AC3E}">
-        <p14:creationId xmlns:p14="http://schemas.microsoft.com/office/powerpoint/2010/main" val="990158736"/>
-      </p:ext>
-    </p:extLst>
   </p:cSld>
   <p:clrMapOvr>
     <a:masterClrMapping/>
@@ -1888,7 +1886,6 @@
           <a:p>
             <a:fld id="{5BCAD085-E8A6-8845-BD4E-CB4CCA059FC4}" type="datetimeFigureOut">
               <a:rPr lang="en-US" smtClean="0"/>
-              <a:t>1/27/13</a:t>
             </a:fld>
             <a:endParaRPr lang="en-US"/>
           </a:p>
@@ -1930,18 +1927,12 @@
           <a:p>
             <a:fld id="{C1FF6DA9-008F-8B48-92A6-B652298478BF}" type="slidenum">
               <a:rPr lang="en-US" smtClean="0"/>
-              <a:t>‹#›</a:t>
             </a:fld>
             <a:endParaRPr lang="en-US"/>
           </a:p>
         </p:txBody>
       </p:sp>
     </p:spTree>
-    <p:extLst>
-      <p:ext uri="{BB962C8B-B14F-4D97-AF65-F5344CB8AC3E}">
-        <p14:creationId xmlns:p14="http://schemas.microsoft.com/office/powerpoint/2010/main" val="727027711"/>
-      </p:ext>
-    </p:extLst>
   </p:cSld>
   <p:clrMapOvr>
     <a:masterClrMapping/>
@@ -1983,7 +1974,6 @@
           <a:p>
             <a:fld id="{5BCAD085-E8A6-8845-BD4E-CB4CCA059FC4}" type="datetimeFigureOut">
               <a:rPr lang="en-US" smtClean="0"/>
-              <a:t>1/27/13</a:t>
             </a:fld>
             <a:endParaRPr lang="en-US"/>
           </a:p>
@@ -2025,18 +2015,12 @@
           <a:p>
             <a:fld id="{C1FF6DA9-008F-8B48-92A6-B652298478BF}" type="slidenum">
               <a:rPr lang="en-US" smtClean="0"/>
-              <a:t>‹#›</a:t>
             </a:fld>
             <a:endParaRPr lang="en-US"/>
           </a:p>
         </p:txBody>
       </p:sp>
     </p:spTree>
-    <p:extLst>
-      <p:ext uri="{BB962C8B-B14F-4D97-AF65-F5344CB8AC3E}">
-        <p14:creationId xmlns:p14="http://schemas.microsoft.com/office/powerpoint/2010/main" val="1212999818"/>
-      </p:ext>
-    </p:extLst>
   </p:cSld>
   <p:clrMapOvr>
     <a:masterClrMapping/>
@@ -2146,6 +2130,7 @@
               <a:rPr lang="en-US" smtClean="0"/>
               <a:t>Click to edit Master text styles</a:t>
             </a:r>
+            <a:endParaRPr lang="en-US" smtClean="0"/>
           </a:p>
           <a:p>
             <a:pPr lvl="1"/>
@@ -2153,6 +2138,7 @@
               <a:rPr lang="en-US" smtClean="0"/>
               <a:t>Second level</a:t>
             </a:r>
+            <a:endParaRPr lang="en-US" smtClean="0"/>
           </a:p>
           <a:p>
             <a:pPr lvl="2"/>
@@ -2160,6 +2146,7 @@
               <a:rPr lang="en-US" smtClean="0"/>
               <a:t>Third level</a:t>
             </a:r>
+            <a:endParaRPr lang="en-US" smtClean="0"/>
           </a:p>
           <a:p>
             <a:pPr lvl="3"/>
@@ -2167,6 +2154,7 @@
               <a:rPr lang="en-US" smtClean="0"/>
               <a:t>Fourth level</a:t>
             </a:r>
+            <a:endParaRPr lang="en-US" smtClean="0"/>
           </a:p>
           <a:p>
             <a:pPr lvl="4"/>
@@ -2240,6 +2228,7 @@
               <a:rPr lang="en-US" smtClean="0"/>
               <a:t>Click to edit Master text styles</a:t>
             </a:r>
+            <a:endParaRPr lang="en-US" smtClean="0"/>
           </a:p>
         </p:txBody>
       </p:sp>
@@ -2260,7 +2249,6 @@
           <a:p>
             <a:fld id="{5BCAD085-E8A6-8845-BD4E-CB4CCA059FC4}" type="datetimeFigureOut">
               <a:rPr lang="en-US" smtClean="0"/>
-              <a:t>1/27/13</a:t>
             </a:fld>
             <a:endParaRPr lang="en-US"/>
           </a:p>
@@ -2302,18 +2290,12 @@
           <a:p>
             <a:fld id="{C1FF6DA9-008F-8B48-92A6-B652298478BF}" type="slidenum">
               <a:rPr lang="en-US" smtClean="0"/>
-              <a:t>‹#›</a:t>
             </a:fld>
             <a:endParaRPr lang="en-US"/>
           </a:p>
         </p:txBody>
       </p:sp>
     </p:spTree>
-    <p:extLst>
-      <p:ext uri="{BB962C8B-B14F-4D97-AF65-F5344CB8AC3E}">
-        <p14:creationId xmlns:p14="http://schemas.microsoft.com/office/powerpoint/2010/main" val="1840726560"/>
-      </p:ext>
-    </p:extLst>
   </p:cSld>
   <p:clrMapOvr>
     <a:masterClrMapping/>
@@ -2493,6 +2475,7 @@
               <a:rPr lang="en-US" smtClean="0"/>
               <a:t>Click to edit Master text styles</a:t>
             </a:r>
+            <a:endParaRPr lang="en-US" smtClean="0"/>
           </a:p>
         </p:txBody>
       </p:sp>
@@ -2513,7 +2496,6 @@
           <a:p>
             <a:fld id="{5BCAD085-E8A6-8845-BD4E-CB4CCA059FC4}" type="datetimeFigureOut">
               <a:rPr lang="en-US" smtClean="0"/>
-              <a:t>1/27/13</a:t>
             </a:fld>
             <a:endParaRPr lang="en-US"/>
           </a:p>
@@ -2555,18 +2537,12 @@
           <a:p>
             <a:fld id="{C1FF6DA9-008F-8B48-92A6-B652298478BF}" type="slidenum">
               <a:rPr lang="en-US" smtClean="0"/>
-              <a:t>‹#›</a:t>
             </a:fld>
             <a:endParaRPr lang="en-US"/>
           </a:p>
         </p:txBody>
       </p:sp>
     </p:spTree>
-    <p:extLst>
-      <p:ext uri="{BB962C8B-B14F-4D97-AF65-F5344CB8AC3E}">
-        <p14:creationId xmlns:p14="http://schemas.microsoft.com/office/powerpoint/2010/main" val="3889236939"/>
-      </p:ext>
-    </p:extLst>
   </p:cSld>
   <p:clrMapOvr>
     <a:masterClrMapping/>
@@ -2659,6 +2635,7 @@
               <a:rPr lang="en-US" smtClean="0"/>
               <a:t>Click to edit Master text styles</a:t>
             </a:r>
+            <a:endParaRPr lang="en-US" smtClean="0"/>
           </a:p>
           <a:p>
             <a:pPr lvl="1"/>
@@ -2666,6 +2643,7 @@
               <a:rPr lang="en-US" smtClean="0"/>
               <a:t>Second level</a:t>
             </a:r>
+            <a:endParaRPr lang="en-US" smtClean="0"/>
           </a:p>
           <a:p>
             <a:pPr lvl="2"/>
@@ -2673,6 +2651,7 @@
               <a:rPr lang="en-US" smtClean="0"/>
               <a:t>Third level</a:t>
             </a:r>
+            <a:endParaRPr lang="en-US" smtClean="0"/>
           </a:p>
           <a:p>
             <a:pPr lvl="3"/>
@@ -2680,6 +2659,7 @@
               <a:rPr lang="en-US" smtClean="0"/>
               <a:t>Fourth level</a:t>
             </a:r>
+            <a:endParaRPr lang="en-US" smtClean="0"/>
           </a:p>
           <a:p>
             <a:pPr lvl="4"/>
@@ -2726,7 +2706,6 @@
           <a:p>
             <a:fld id="{5BCAD085-E8A6-8845-BD4E-CB4CCA059FC4}" type="datetimeFigureOut">
               <a:rPr lang="en-US" smtClean="0"/>
-              <a:t>1/27/13</a:t>
             </a:fld>
             <a:endParaRPr lang="en-US"/>
           </a:p>
@@ -2804,18 +2783,12 @@
           <a:p>
             <a:fld id="{C1FF6DA9-008F-8B48-92A6-B652298478BF}" type="slidenum">
               <a:rPr lang="en-US" smtClean="0"/>
-              <a:t>‹#›</a:t>
             </a:fld>
             <a:endParaRPr lang="en-US"/>
           </a:p>
         </p:txBody>
       </p:sp>
     </p:spTree>
-    <p:extLst>
-      <p:ext uri="{BB962C8B-B14F-4D97-AF65-F5344CB8AC3E}">
-        <p14:creationId xmlns:p14="http://schemas.microsoft.com/office/powerpoint/2010/main" val="2209977519"/>
-      </p:ext>
-    </p:extLst>
   </p:cSld>
   <p:clrMap bg1="lt1" tx1="dk1" bg2="lt2" tx2="dk2" accent1="accent1" accent2="accent2" accent3="accent3" accent4="accent4" accent5="accent5" accent6="accent6" hlink="hlink" folHlink="folHlink"/>
   <p:sldLayoutIdLst>
@@ -2853,7 +2826,7 @@
         <a:spcBef>
           <a:spcPct val="20000"/>
         </a:spcBef>
-        <a:buFont typeface="Arial"/>
+        <a:buFont typeface="Arial" panose="020B0604020202020204"/>
         <a:buChar char="•"/>
         <a:defRPr sz="3200" kern="1200">
           <a:solidFill>
@@ -2868,7 +2841,7 @@
         <a:spcBef>
           <a:spcPct val="20000"/>
         </a:spcBef>
-        <a:buFont typeface="Arial"/>
+        <a:buFont typeface="Arial" panose="020B0604020202020204"/>
         <a:buChar char="–"/>
         <a:defRPr sz="2800" kern="1200">
           <a:solidFill>
@@ -2883,7 +2856,7 @@
         <a:spcBef>
           <a:spcPct val="20000"/>
         </a:spcBef>
-        <a:buFont typeface="Arial"/>
+        <a:buFont typeface="Arial" panose="020B0604020202020204"/>
         <a:buChar char="•"/>
         <a:defRPr sz="2400" kern="1200">
           <a:solidFill>
@@ -2898,7 +2871,7 @@
         <a:spcBef>
           <a:spcPct val="20000"/>
         </a:spcBef>
-        <a:buFont typeface="Arial"/>
+        <a:buFont typeface="Arial" panose="020B0604020202020204"/>
         <a:buChar char="–"/>
         <a:defRPr sz="2000" kern="1200">
           <a:solidFill>
@@ -2913,7 +2886,7 @@
         <a:spcBef>
           <a:spcPct val="20000"/>
         </a:spcBef>
-        <a:buFont typeface="Arial"/>
+        <a:buFont typeface="Arial" panose="020B0604020202020204"/>
         <a:buChar char="»"/>
         <a:defRPr sz="2000" kern="1200">
           <a:solidFill>
@@ -2928,7 +2901,7 @@
         <a:spcBef>
           <a:spcPct val="20000"/>
         </a:spcBef>
-        <a:buFont typeface="Arial"/>
+        <a:buFont typeface="Arial" panose="020B0604020202020204"/>
         <a:buChar char="•"/>
         <a:defRPr sz="2000" kern="1200">
           <a:solidFill>
@@ -2943,7 +2916,7 @@
         <a:spcBef>
           <a:spcPct val="20000"/>
         </a:spcBef>
-        <a:buFont typeface="Arial"/>
+        <a:buFont typeface="Arial" panose="020B0604020202020204"/>
         <a:buChar char="•"/>
         <a:defRPr sz="2000" kern="1200">
           <a:solidFill>
@@ -2958,7 +2931,7 @@
         <a:spcBef>
           <a:spcPct val="20000"/>
         </a:spcBef>
-        <a:buFont typeface="Arial"/>
+        <a:buFont typeface="Arial" panose="020B0604020202020204"/>
         <a:buChar char="•"/>
         <a:defRPr sz="2000" kern="1200">
           <a:solidFill>
@@ -2973,7 +2946,7 @@
         <a:spcBef>
           <a:spcPct val="20000"/>
         </a:spcBef>
-        <a:buFont typeface="Arial"/>
+        <a:buFont typeface="Arial" panose="020B0604020202020204"/>
         <a:buChar char="•"/>
         <a:defRPr sz="2000" kern="1200">
           <a:solidFill>
@@ -3085,7 +3058,7 @@
 </file>
 
 <file path=ppt/slides/slide1.xml><?xml version="1.0" encoding="utf-8"?>
-<p:sld xmlns:a="http://schemas.openxmlformats.org/drawingml/2006/main" xmlns:p="http://schemas.openxmlformats.org/presentationml/2006/main" xmlns:r="http://schemas.openxmlformats.org/officeDocument/2006/relationships">
+<p:sld xmlns:a="http://schemas.openxmlformats.org/drawingml/2006/main" xmlns:r="http://schemas.openxmlformats.org/officeDocument/2006/relationships" xmlns:p="http://schemas.openxmlformats.org/presentationml/2006/main">
   <p:cSld>
     <p:bg>
       <p:bgPr>
@@ -3111,7 +3084,7 @@
         <p:spPr>
           <a:xfrm>
             <a:off x="914400" y="1645920"/>
-            <a:ext cx="10332720" cy="1097280"/>
+            <a:ext cx="2342515" cy="768350"/>
           </a:xfrm>
           <a:prstGeom prst="rect">
             <a:avLst/>
@@ -3129,11 +3102,15 @@
                 <a:solidFill>
                   <a:srgbClr val="FFFFFF"/>
                 </a:solidFill>
-                <a:latin typeface="Segoe UI"/>
-              </a:defRPr>
-            </a:pPr>
-            <a:r>
-              <a:t>V | VLearn</a:t>
+                <a:latin typeface="Segoe UI" panose="020B0502040204020203"/>
+              </a:defRPr>
+            </a:pPr>
+            <a:r>
+              <a:rPr lang="en-US"/>
+              <a:t>| </a:t>
+            </a:r>
+            <a:r>
+              <a:t>VLearn</a:t>
             </a:r>
           </a:p>
         </p:txBody>
@@ -3165,7 +3142,7 @@
                 <a:solidFill>
                   <a:srgbClr val="BAE6FD"/>
                 </a:solidFill>
-                <a:latin typeface="Segoe UI"/>
+                <a:latin typeface="Segoe UI" panose="020B0502040204020203"/>
               </a:defRPr>
             </a:pPr>
             <a:r>
@@ -3181,7 +3158,7 @@
                 <a:solidFill>
                   <a:srgbClr val="E2E8F0"/>
                 </a:solidFill>
-                <a:latin typeface="Segoe UI"/>
+                <a:latin typeface="Segoe UI" panose="020B0502040204020203"/>
               </a:defRPr>
             </a:pPr>
             <a:r>
@@ -3228,7 +3205,7 @@
           </a:fontRef>
         </p:style>
         <p:txBody>
-          <a:bodyPr rtlCol="0" anchor="ctr" wrap="square"/>
+          <a:bodyPr wrap="square" rtlCol="0" anchor="ctr"/>
           <a:lstStyle/>
           <a:p>
             <a:pPr algn="ctr">
@@ -3239,7 +3216,7 @@
               </a:defRPr>
             </a:pPr>
             <a:r>
-              <a:t>🎯 DỰ ÁN HACKATHON K4 PHASE 1 · HỆ THỐNG VLEARN FAILFIRST AI</a:t>
+              <a:t>DỰ ÁN HACKATHON K4 PHASE 1 · HỆ THỐNG VLEARN FAILFIRST AI</a:t>
             </a:r>
           </a:p>
         </p:txBody>
@@ -3253,7 +3230,7 @@
 </file>
 
 <file path=ppt/slides/slide2.xml><?xml version="1.0" encoding="utf-8"?>
-<p:sld xmlns:a="http://schemas.openxmlformats.org/drawingml/2006/main" xmlns:p="http://schemas.openxmlformats.org/presentationml/2006/main" xmlns:r="http://schemas.openxmlformats.org/officeDocument/2006/relationships">
+<p:sld xmlns:a="http://schemas.openxmlformats.org/drawingml/2006/main" xmlns:r="http://schemas.openxmlformats.org/officeDocument/2006/relationships" xmlns:p="http://schemas.openxmlformats.org/presentationml/2006/main">
   <p:cSld>
     <p:bg>
       <p:bgPr>
@@ -3297,7 +3274,7 @@
                 <a:solidFill>
                   <a:srgbClr val="DC2626"/>
                 </a:solidFill>
-                <a:latin typeface="Segoe UI"/>
+                <a:latin typeface="Segoe UI" panose="020B0502040204020203"/>
               </a:defRPr>
             </a:pPr>
             <a:r>
@@ -3333,7 +3310,7 @@
                 <a:solidFill>
                   <a:srgbClr val="1E3A8A"/>
                 </a:solidFill>
-                <a:latin typeface="Segoe UI"/>
+                <a:latin typeface="Segoe UI" panose="020B0502040204020203"/>
               </a:defRPr>
             </a:pPr>
             <a:r>
@@ -3380,7 +3357,7 @@
           </a:fontRef>
         </p:style>
         <p:txBody>
-          <a:bodyPr rtlCol="0" anchor="ctr" wrap="square" tIns="274320" lIns="274320" rIns="274320"/>
+          <a:bodyPr wrap="square" lIns="274320" tIns="274320" rIns="274320" rtlCol="0" anchor="ctr"/>
           <a:lstStyle/>
           <a:p>
             <a:pPr algn="ctr">
@@ -3388,11 +3365,24 @@
                 <a:solidFill>
                   <a:srgbClr val="1E3A8A"/>
                 </a:solidFill>
-                <a:latin typeface="Segoe UI"/>
-              </a:defRPr>
-            </a:pPr>
-            <a:r>
-              <a:t>📖 Đọc Lướt &amp; Xem Video Thụ Động</a:t>
+                <a:latin typeface="Segoe UI" panose="020B0502040204020203"/>
+              </a:defRPr>
+            </a:pPr>
+            <a:r>
+              <a:t>Đọc Lướt &amp; </a:t>
+            </a:r>
+          </a:p>
+          <a:p>
+            <a:pPr algn="ctr">
+              <a:defRPr sz="1600" b="1">
+                <a:solidFill>
+                  <a:srgbClr val="1E3A8A"/>
+                </a:solidFill>
+                <a:latin typeface="Segoe UI" panose="020B0502040204020203"/>
+              </a:defRPr>
+            </a:pPr>
+            <a:r>
+              <a:t>Xem Video Thụ Động</a:t>
             </a:r>
           </a:p>
           <a:p>
@@ -3404,7 +3394,7 @@
                 <a:solidFill>
                   <a:srgbClr val="475569"/>
                 </a:solidFill>
-                <a:latin typeface="Segoe UI"/>
+                <a:latin typeface="Segoe UI" panose="020B0502040204020203"/>
               </a:defRPr>
             </a:pPr>
             <a:r>
@@ -3451,7 +3441,7 @@
           </a:fontRef>
         </p:style>
         <p:txBody>
-          <a:bodyPr rtlCol="0" anchor="ctr" wrap="square" tIns="274320" lIns="274320" rIns="274320"/>
+          <a:bodyPr wrap="square" lIns="274320" tIns="274320" rIns="274320" rtlCol="0" anchor="ctr"/>
           <a:lstStyle/>
           <a:p>
             <a:pPr algn="ctr">
@@ -3459,11 +3449,11 @@
                 <a:solidFill>
                   <a:srgbClr val="1E3A8A"/>
                 </a:solidFill>
-                <a:latin typeface="Segoe UI"/>
-              </a:defRPr>
-            </a:pPr>
-            <a:r>
-              <a:t>🧠 Ảo Tưởng Nắm Vững (Illusion)</a:t>
+                <a:latin typeface="Segoe UI" panose="020B0502040204020203"/>
+              </a:defRPr>
+            </a:pPr>
+            <a:r>
+              <a:t>Ảo Tưởng Nắm Vững (Illusion)</a:t>
             </a:r>
           </a:p>
           <a:p>
@@ -3475,7 +3465,7 @@
                 <a:solidFill>
                   <a:srgbClr val="475569"/>
                 </a:solidFill>
-                <a:latin typeface="Segoe UI"/>
+                <a:latin typeface="Segoe UI" panose="020B0502040204020203"/>
               </a:defRPr>
             </a:pPr>
             <a:r>
@@ -3522,7 +3512,7 @@
           </a:fontRef>
         </p:style>
         <p:txBody>
-          <a:bodyPr rtlCol="0" anchor="ctr" wrap="square" tIns="274320" lIns="274320" rIns="274320"/>
+          <a:bodyPr wrap="square" lIns="274320" tIns="274320" rIns="274320" rtlCol="0" anchor="ctr"/>
           <a:lstStyle/>
           <a:p>
             <a:pPr algn="ctr">
@@ -3530,11 +3520,24 @@
                 <a:solidFill>
                   <a:srgbClr val="1E3A8A"/>
                 </a:solidFill>
-                <a:latin typeface="Segoe UI"/>
-              </a:defRPr>
-            </a:pPr>
-            <a:r>
-              <a:t>❓ Thiếu Chẩn Đoán Tự Động</a:t>
+                <a:latin typeface="Segoe UI" panose="020B0502040204020203"/>
+              </a:defRPr>
+            </a:pPr>
+            <a:r>
+              <a:t>Thiếu Chẩn Đoán </a:t>
+            </a:r>
+          </a:p>
+          <a:p>
+            <a:pPr algn="ctr">
+              <a:defRPr sz="1600" b="1">
+                <a:solidFill>
+                  <a:srgbClr val="1E3A8A"/>
+                </a:solidFill>
+                <a:latin typeface="Segoe UI" panose="020B0502040204020203"/>
+              </a:defRPr>
+            </a:pPr>
+            <a:r>
+              <a:t>Tự Động</a:t>
             </a:r>
           </a:p>
           <a:p>
@@ -3546,7 +3549,7 @@
                 <a:solidFill>
                   <a:srgbClr val="475569"/>
                 </a:solidFill>
-                <a:latin typeface="Segoe UI"/>
+                <a:latin typeface="Segoe UI" panose="020B0502040204020203"/>
               </a:defRPr>
             </a:pPr>
             <a:r>
@@ -3564,7 +3567,7 @@
 </file>
 
 <file path=ppt/slides/slide3.xml><?xml version="1.0" encoding="utf-8"?>
-<p:sld xmlns:a="http://schemas.openxmlformats.org/drawingml/2006/main" xmlns:p="http://schemas.openxmlformats.org/presentationml/2006/main" xmlns:r="http://schemas.openxmlformats.org/officeDocument/2006/relationships">
+<p:sld xmlns:a="http://schemas.openxmlformats.org/drawingml/2006/main" xmlns:r="http://schemas.openxmlformats.org/officeDocument/2006/relationships" xmlns:p="http://schemas.openxmlformats.org/presentationml/2006/main">
   <p:cSld>
     <p:bg>
       <p:bgPr>
@@ -3608,7 +3611,7 @@
                 <a:solidFill>
                   <a:srgbClr val="DC2626"/>
                 </a:solidFill>
-                <a:latin typeface="Segoe UI"/>
+                <a:latin typeface="Segoe UI" panose="020B0502040204020203"/>
               </a:defRPr>
             </a:pPr>
             <a:r>
@@ -3644,7 +3647,7 @@
                 <a:solidFill>
                   <a:srgbClr val="1E3A8A"/>
                 </a:solidFill>
-                <a:latin typeface="Segoe UI"/>
+                <a:latin typeface="Segoe UI" panose="020B0502040204020203"/>
               </a:defRPr>
             </a:pPr>
             <a:r>
@@ -3691,7 +3694,7 @@
           </a:fontRef>
         </p:style>
         <p:txBody>
-          <a:bodyPr rtlCol="0" anchor="ctr" wrap="square" tIns="182880" lIns="274320"/>
+          <a:bodyPr wrap="square" lIns="274320" tIns="182880" rtlCol="0" anchor="ctr"/>
           <a:lstStyle/>
           <a:p>
             <a:pPr algn="ctr">
@@ -3699,11 +3702,18 @@
                 <a:solidFill>
                   <a:srgbClr val="1E3A8A"/>
                 </a:solidFill>
-                <a:latin typeface="Segoe UI"/>
-              </a:defRPr>
-            </a:pPr>
-            <a:r>
-              <a:t>1. Tự Thử &amp; Vấp Ngã Trước</a:t>
+                <a:latin typeface="Segoe UI" panose="020B0502040204020203"/>
+              </a:defRPr>
+            </a:pPr>
+            <a:r>
+              <a:t>1. Tự Thử &amp;</a:t>
+            </a:r>
+            <a:r>
+              <a:rPr lang="en-US"/>
+              <a:t> Sai</a:t>
+            </a:r>
+            <a:r>
+              <a:t> Trước</a:t>
             </a:r>
           </a:p>
           <a:p>
@@ -3715,7 +3725,7 @@
                 <a:solidFill>
                   <a:srgbClr val="0F172A"/>
                 </a:solidFill>
-                <a:latin typeface="Segoe UI"/>
+                <a:latin typeface="Segoe UI" panose="020B0502040204020203"/>
               </a:defRPr>
             </a:pPr>
             <a:r>
@@ -3762,7 +3772,7 @@
           </a:fontRef>
         </p:style>
         <p:txBody>
-          <a:bodyPr rtlCol="0" anchor="ctr" wrap="square" tIns="182880" lIns="274320"/>
+          <a:bodyPr wrap="square" lIns="274320" tIns="182880" rtlCol="0" anchor="ctr"/>
           <a:lstStyle/>
           <a:p>
             <a:pPr algn="ctr">
@@ -3770,11 +3780,11 @@
                 <a:solidFill>
                   <a:srgbClr val="1E3A8A"/>
                 </a:solidFill>
-                <a:latin typeface="Segoe UI"/>
-              </a:defRPr>
-            </a:pPr>
-            <a:r>
-              <a:t>2. AI Tutor Chẩn Đoán Lỗi</a:t>
+                <a:latin typeface="Segoe UI" panose="020B0502040204020203"/>
+              </a:defRPr>
+            </a:pPr>
+            <a:r>
+              <a:t>2. AI Tutor </a:t>
             </a:r>
           </a:p>
           <a:p>
@@ -3786,7 +3796,7 @@
                 <a:solidFill>
                   <a:srgbClr val="0F172A"/>
                 </a:solidFill>
-                <a:latin typeface="Segoe UI"/>
+                <a:latin typeface="Segoe UI" panose="020B0502040204020203"/>
               </a:defRPr>
             </a:pPr>
             <a:r>
@@ -3833,7 +3843,7 @@
           </a:fontRef>
         </p:style>
         <p:txBody>
-          <a:bodyPr rtlCol="0" anchor="ctr" wrap="square" tIns="182880" lIns="274320"/>
+          <a:bodyPr wrap="square" lIns="274320" tIns="182880" rtlCol="0" anchor="ctr"/>
           <a:lstStyle/>
           <a:p>
             <a:pPr algn="ctr">
@@ -3841,7 +3851,7 @@
                 <a:solidFill>
                   <a:srgbClr val="1E3A8A"/>
                 </a:solidFill>
-                <a:latin typeface="Segoe UI"/>
+                <a:latin typeface="Segoe UI" panose="020B0502040204020203"/>
               </a:defRPr>
             </a:pPr>
             <a:r>
@@ -3857,7 +3867,7 @@
                 <a:solidFill>
                   <a:srgbClr val="0F172A"/>
                 </a:solidFill>
-                <a:latin typeface="Segoe UI"/>
+                <a:latin typeface="Segoe UI" panose="020B0502040204020203"/>
               </a:defRPr>
             </a:pPr>
             <a:r>
@@ -3875,7 +3885,7 @@
 </file>
 
 <file path=ppt/slides/slide4.xml><?xml version="1.0" encoding="utf-8"?>
-<p:sld xmlns:a="http://schemas.openxmlformats.org/drawingml/2006/main" xmlns:p="http://schemas.openxmlformats.org/presentationml/2006/main" xmlns:r="http://schemas.openxmlformats.org/officeDocument/2006/relationships">
+<p:sld xmlns:a="http://schemas.openxmlformats.org/drawingml/2006/main" xmlns:r="http://schemas.openxmlformats.org/officeDocument/2006/relationships" xmlns:p="http://schemas.openxmlformats.org/presentationml/2006/main">
   <p:cSld>
     <p:bg>
       <p:bgPr>
@@ -3919,7 +3929,7 @@
                 <a:solidFill>
                   <a:srgbClr val="DC2626"/>
                 </a:solidFill>
-                <a:latin typeface="Segoe UI"/>
+                <a:latin typeface="Segoe UI" panose="020B0502040204020203"/>
               </a:defRPr>
             </a:pPr>
             <a:r>
@@ -3955,7 +3965,7 @@
                 <a:solidFill>
                   <a:srgbClr val="1E3A8A"/>
                 </a:solidFill>
-                <a:latin typeface="Segoe UI"/>
+                <a:latin typeface="Segoe UI" panose="020B0502040204020203"/>
               </a:defRPr>
             </a:pPr>
             <a:r>
@@ -4002,7 +4012,7 @@
           </a:fontRef>
         </p:style>
         <p:txBody>
-          <a:bodyPr rtlCol="0" anchor="ctr" wrap="square" tIns="274320" lIns="228600" rIns="228600"/>
+          <a:bodyPr wrap="square" lIns="228600" tIns="274320" rIns="228600" rtlCol="0" anchor="ctr"/>
           <a:lstStyle/>
           <a:p>
             <a:pPr algn="ctr">
@@ -4010,11 +4020,24 @@
                 <a:solidFill>
                   <a:srgbClr val="1E3A8A"/>
                 </a:solidFill>
-                <a:latin typeface="Segoe UI"/>
-              </a:defRPr>
-            </a:pPr>
-            <a:r>
-              <a:t>Bước 1: Làm bài</a:t>
+                <a:latin typeface="Segoe UI" panose="020B0502040204020203"/>
+              </a:defRPr>
+            </a:pPr>
+            <a:r>
+              <a:t>Bước 1: </a:t>
+            </a:r>
+          </a:p>
+          <a:p>
+            <a:pPr algn="ctr">
+              <a:defRPr sz="1500" b="1">
+                <a:solidFill>
+                  <a:srgbClr val="1E3A8A"/>
+                </a:solidFill>
+                <a:latin typeface="Segoe UI" panose="020B0502040204020203"/>
+              </a:defRPr>
+            </a:pPr>
+            <a:r>
+              <a:t>Làm bài</a:t>
             </a:r>
           </a:p>
           <a:p>
@@ -4026,7 +4049,7 @@
                 <a:solidFill>
                   <a:srgbClr val="475569"/>
                 </a:solidFill>
-                <a:latin typeface="Segoe UI"/>
+                <a:latin typeface="Segoe UI" panose="020B0502040204020203"/>
               </a:defRPr>
             </a:pPr>
             <a:r>
@@ -4073,7 +4096,7 @@
           </a:fontRef>
         </p:style>
         <p:txBody>
-          <a:bodyPr rtlCol="0" anchor="ctr" wrap="square" tIns="274320" lIns="228600" rIns="228600"/>
+          <a:bodyPr wrap="square" lIns="228600" tIns="274320" rIns="228600" rtlCol="0" anchor="ctr"/>
           <a:lstStyle/>
           <a:p>
             <a:pPr algn="ctr">
@@ -4081,11 +4104,24 @@
                 <a:solidFill>
                   <a:srgbClr val="1E3A8A"/>
                 </a:solidFill>
-                <a:latin typeface="Segoe UI"/>
-              </a:defRPr>
-            </a:pPr>
-            <a:r>
-              <a:t>Bước 2: AI Chẩn đoán</a:t>
+                <a:latin typeface="Segoe UI" panose="020B0502040204020203"/>
+              </a:defRPr>
+            </a:pPr>
+            <a:r>
+              <a:t>Bước 2: </a:t>
+            </a:r>
+          </a:p>
+          <a:p>
+            <a:pPr algn="ctr">
+              <a:defRPr sz="1500" b="1">
+                <a:solidFill>
+                  <a:srgbClr val="1E3A8A"/>
+                </a:solidFill>
+                <a:latin typeface="Segoe UI" panose="020B0502040204020203"/>
+              </a:defRPr>
+            </a:pPr>
+            <a:r>
+              <a:t>AI Chẩn đoán</a:t>
             </a:r>
           </a:p>
           <a:p>
@@ -4097,7 +4133,7 @@
                 <a:solidFill>
                   <a:srgbClr val="475569"/>
                 </a:solidFill>
-                <a:latin typeface="Segoe UI"/>
+                <a:latin typeface="Segoe UI" panose="020B0502040204020203"/>
               </a:defRPr>
             </a:pPr>
             <a:r>
@@ -4144,7 +4180,7 @@
           </a:fontRef>
         </p:style>
         <p:txBody>
-          <a:bodyPr rtlCol="0" anchor="ctr" wrap="square" tIns="274320" lIns="228600" rIns="228600"/>
+          <a:bodyPr wrap="square" lIns="228600" tIns="274320" rIns="228600" rtlCol="0" anchor="ctr"/>
           <a:lstStyle/>
           <a:p>
             <a:pPr algn="ctr">
@@ -4152,11 +4188,24 @@
                 <a:solidFill>
                   <a:srgbClr val="1E3A8A"/>
                 </a:solidFill>
-                <a:latin typeface="Segoe UI"/>
-              </a:defRPr>
-            </a:pPr>
-            <a:r>
-              <a:t>Bước 3: Tương tác</a:t>
+                <a:latin typeface="Segoe UI" panose="020B0502040204020203"/>
+              </a:defRPr>
+            </a:pPr>
+            <a:r>
+              <a:t>Bước 3: </a:t>
+            </a:r>
+          </a:p>
+          <a:p>
+            <a:pPr algn="ctr">
+              <a:defRPr sz="1500" b="1">
+                <a:solidFill>
+                  <a:srgbClr val="1E3A8A"/>
+                </a:solidFill>
+                <a:latin typeface="Segoe UI" panose="020B0502040204020203"/>
+              </a:defRPr>
+            </a:pPr>
+            <a:r>
+              <a:t>Tương tác</a:t>
             </a:r>
           </a:p>
           <a:p>
@@ -4168,7 +4217,7 @@
                 <a:solidFill>
                   <a:srgbClr val="475569"/>
                 </a:solidFill>
-                <a:latin typeface="Segoe UI"/>
+                <a:latin typeface="Segoe UI" panose="020B0502040204020203"/>
               </a:defRPr>
             </a:pPr>
             <a:r>
@@ -4215,7 +4264,7 @@
           </a:fontRef>
         </p:style>
         <p:txBody>
-          <a:bodyPr rtlCol="0" anchor="ctr" wrap="square" tIns="274320" lIns="228600" rIns="228600"/>
+          <a:bodyPr wrap="square" lIns="228600" tIns="274320" rIns="228600" rtlCol="0" anchor="ctr"/>
           <a:lstStyle/>
           <a:p>
             <a:pPr algn="ctr">
@@ -4223,11 +4272,24 @@
                 <a:solidFill>
                   <a:srgbClr val="1E3A8A"/>
                 </a:solidFill>
-                <a:latin typeface="Segoe UI"/>
-              </a:defRPr>
-            </a:pPr>
-            <a:r>
-              <a:t>Bước 4: Xác nhận</a:t>
+                <a:latin typeface="Segoe UI" panose="020B0502040204020203"/>
+              </a:defRPr>
+            </a:pPr>
+            <a:r>
+              <a:t>Bước 4: </a:t>
+            </a:r>
+          </a:p>
+          <a:p>
+            <a:pPr algn="ctr">
+              <a:defRPr sz="1500" b="1">
+                <a:solidFill>
+                  <a:srgbClr val="1E3A8A"/>
+                </a:solidFill>
+                <a:latin typeface="Segoe UI" panose="020B0502040204020203"/>
+              </a:defRPr>
+            </a:pPr>
+            <a:r>
+              <a:t>Xác nhận</a:t>
             </a:r>
           </a:p>
           <a:p>
@@ -4239,7 +4301,7 @@
                 <a:solidFill>
                   <a:srgbClr val="475569"/>
                 </a:solidFill>
-                <a:latin typeface="Segoe UI"/>
+                <a:latin typeface="Segoe UI" panose="020B0502040204020203"/>
               </a:defRPr>
             </a:pPr>
             <a:r>
@@ -4257,7 +4319,7 @@
 </file>
 
 <file path=ppt/slides/slide5.xml><?xml version="1.0" encoding="utf-8"?>
-<p:sld xmlns:a="http://schemas.openxmlformats.org/drawingml/2006/main" xmlns:p="http://schemas.openxmlformats.org/presentationml/2006/main" xmlns:r="http://schemas.openxmlformats.org/officeDocument/2006/relationships">
+<p:sld xmlns:a="http://schemas.openxmlformats.org/drawingml/2006/main" xmlns:r="http://schemas.openxmlformats.org/officeDocument/2006/relationships" xmlns:p="http://schemas.openxmlformats.org/presentationml/2006/main">
   <p:cSld>
     <p:bg>
       <p:bgPr>
@@ -4301,7 +4363,7 @@
                 <a:solidFill>
                   <a:srgbClr val="DC2626"/>
                 </a:solidFill>
-                <a:latin typeface="Segoe UI"/>
+                <a:latin typeface="Segoe UI" panose="020B0502040204020203"/>
               </a:defRPr>
             </a:pPr>
             <a:r>
@@ -4337,7 +4399,7 @@
                 <a:solidFill>
                   <a:srgbClr val="1E3A8A"/>
                 </a:solidFill>
-                <a:latin typeface="Segoe UI"/>
+                <a:latin typeface="Segoe UI" panose="020B0502040204020203"/>
               </a:defRPr>
             </a:pPr>
             <a:r>
@@ -4384,7 +4446,7 @@
           </a:fontRef>
         </p:style>
         <p:txBody>
-          <a:bodyPr rtlCol="0" anchor="ctr" wrap="square" tIns="274320" lIns="274320"/>
+          <a:bodyPr wrap="square" lIns="274320" tIns="274320" rtlCol="0" anchor="ctr"/>
           <a:lstStyle/>
           <a:p>
             <a:pPr algn="ctr">
@@ -4463,7 +4525,7 @@
           </a:fontRef>
         </p:style>
         <p:txBody>
-          <a:bodyPr rtlCol="0" anchor="ctr" wrap="square" tIns="274320" lIns="274320"/>
+          <a:bodyPr wrap="square" lIns="274320" tIns="274320" rtlCol="0" anchor="ctr"/>
           <a:lstStyle/>
           <a:p>
             <a:pPr algn="ctr">
@@ -4513,7 +4575,7 @@
 </file>
 
 <file path=ppt/slides/slide6.xml><?xml version="1.0" encoding="utf-8"?>
-<p:sld xmlns:a="http://schemas.openxmlformats.org/drawingml/2006/main" xmlns:p="http://schemas.openxmlformats.org/presentationml/2006/main" xmlns:r="http://schemas.openxmlformats.org/officeDocument/2006/relationships">
+<p:sld xmlns:a="http://schemas.openxmlformats.org/drawingml/2006/main" xmlns:r="http://schemas.openxmlformats.org/officeDocument/2006/relationships" xmlns:p="http://schemas.openxmlformats.org/presentationml/2006/main">
   <p:cSld>
     <p:bg>
       <p:bgPr>
@@ -4557,7 +4619,7 @@
                 <a:solidFill>
                   <a:srgbClr val="DC2626"/>
                 </a:solidFill>
-                <a:latin typeface="Segoe UI"/>
+                <a:latin typeface="Segoe UI" panose="020B0502040204020203"/>
               </a:defRPr>
             </a:pPr>
             <a:r>
@@ -4593,7 +4655,7 @@
                 <a:solidFill>
                   <a:srgbClr val="1E3A8A"/>
                 </a:solidFill>
-                <a:latin typeface="Segoe UI"/>
+                <a:latin typeface="Segoe UI" panose="020B0502040204020203"/>
               </a:defRPr>
             </a:pPr>
             <a:r>
@@ -4640,7 +4702,7 @@
           </a:fontRef>
         </p:style>
         <p:txBody>
-          <a:bodyPr rtlCol="0" anchor="ctr" wrap="square" tIns="182880" lIns="274320"/>
+          <a:bodyPr wrap="square" lIns="274320" tIns="182880" rtlCol="0" anchor="ctr"/>
           <a:lstStyle/>
           <a:p>
             <a:pPr algn="ctr">
@@ -4651,7 +4713,7 @@
               </a:defRPr>
             </a:pPr>
             <a:r>
-              <a:t>📈 Tăng 3.5x Ghi Nhớ</a:t>
+              <a:t>Tăng 3.5x Ghi Nhớ</a:t>
             </a:r>
           </a:p>
           <a:p>
@@ -4709,7 +4771,7 @@
           </a:fontRef>
         </p:style>
         <p:txBody>
-          <a:bodyPr rtlCol="0" anchor="ctr" wrap="square" tIns="182880" lIns="274320"/>
+          <a:bodyPr wrap="square" lIns="274320" tIns="182880" rtlCol="0" anchor="ctr"/>
           <a:lstStyle/>
           <a:p>
             <a:pPr algn="ctr">
@@ -4720,7 +4782,7 @@
               </a:defRPr>
             </a:pPr>
             <a:r>
-              <a:t>⚡ Tiktoken Đếm Thật</a:t>
+              <a:t>Tiktoken Đếm Thật</a:t>
             </a:r>
           </a:p>
           <a:p>
@@ -4778,7 +4840,7 @@
           </a:fontRef>
         </p:style>
         <p:txBody>
-          <a:bodyPr rtlCol="0" anchor="ctr" wrap="square" tIns="182880" lIns="274320"/>
+          <a:bodyPr wrap="square" lIns="274320" tIns="182880" rtlCol="0" anchor="ctr"/>
           <a:lstStyle/>
           <a:p>
             <a:pPr algn="ctr">
@@ -4789,7 +4851,11 @@
               </a:defRPr>
             </a:pPr>
             <a:r>
-              <a:t>📚 6 Bài Học vlearn-pack</a:t>
+              <a:rPr lang="en-US"/>
+              <a:t>6</a:t>
+            </a:r>
+            <a:r>
+              <a:t> Bài Học vlearn-pack</a:t>
             </a:r>
           </a:p>
           <a:p>
@@ -4847,7 +4913,7 @@
           </a:fontRef>
         </p:style>
         <p:txBody>
-          <a:bodyPr rtlCol="0" anchor="ctr" wrap="square" tIns="182880" lIns="274320"/>
+          <a:bodyPr wrap="square" lIns="274320" tIns="182880" rtlCol="0" anchor="ctr"/>
           <a:lstStyle/>
           <a:p>
             <a:pPr algn="ctr">
@@ -4858,7 +4924,7 @@
               </a:defRPr>
             </a:pPr>
             <a:r>
-              <a:t>🌐 Thiết Kế Chuẩn VLearn UI</a:t>
+              <a:t> Thiết Kế Chuẩn VLearn UI</a:t>
             </a:r>
           </a:p>
           <a:p>
@@ -4887,7 +4953,7 @@
 </file>
 
 <file path=ppt/slides/slide7.xml><?xml version="1.0" encoding="utf-8"?>
-<p:sld xmlns:a="http://schemas.openxmlformats.org/drawingml/2006/main" xmlns:p="http://schemas.openxmlformats.org/presentationml/2006/main" xmlns:r="http://schemas.openxmlformats.org/officeDocument/2006/relationships">
+<p:sld xmlns:a="http://schemas.openxmlformats.org/drawingml/2006/main" xmlns:r="http://schemas.openxmlformats.org/officeDocument/2006/relationships" xmlns:p="http://schemas.openxmlformats.org/presentationml/2006/main">
   <p:cSld>
     <p:bg>
       <p:bgPr>
@@ -4931,7 +4997,7 @@
                 <a:solidFill>
                   <a:srgbClr val="FFFFFF"/>
                 </a:solidFill>
-                <a:latin typeface="Segoe UI"/>
+                <a:latin typeface="Segoe UI" panose="020B0502040204020203"/>
               </a:defRPr>
             </a:pPr>
             <a:r>
@@ -4993,7 +5059,7 @@
           </a:fontRef>
         </p:style>
         <p:txBody>
-          <a:bodyPr rtlCol="0" anchor="ctr" wrap="square" tIns="365760" lIns="457200"/>
+          <a:bodyPr wrap="square" lIns="457200" tIns="365760" rtlCol="0" anchor="ctr"/>
           <a:lstStyle/>
           <a:p>
             <a:pPr algn="ctr">
@@ -5004,7 +5070,7 @@
               </a:defRPr>
             </a:pPr>
             <a:r>
-              <a:t>🚀 TRẢI NGHIỆM SẢN PHẨM VLEARN DEMO TRỰC TIẾP:</a:t>
+              <a:t>TRẢI NGHIỆM SẢN PHẨM VLEARN DEMO TRỰC TIẾP:</a:t>
             </a:r>
           </a:p>
           <a:p>
@@ -5019,7 +5085,11 @@
               </a:defRPr>
             </a:pPr>
             <a:r>
-              <a:t>• Link Demo Server: http://127.0.0.1:5050</a:t>
+              <a:t>• Link Demo Server: </a:t>
+            </a:r>
+            <a:r>
+              <a:rPr lang="en-US" altLang="en-US"/>
+              <a:t>https://vlearn.nova.io.vn/</a:t>
             </a:r>
             <a:br/>
             <a:r>
@@ -5352,6 +5422,10 @@
       </a:style>
     </a:lnDef>
   </a:objectDefaults>
-  <a:extraClrSchemeLst/>
+  <a:extLst>
+    <a:ext uri="{05A4C25C-085E-4340-85A3-A5531E510DB2}">
+      <thm15:themeFamily xmlns:thm15="http://schemas.microsoft.com/office/thememl/2012/main" name="Office Theme" id="{62F939B6-93AF-4DB8-9C6B-D6C7DFDC589F}" vid="{4A3C46E8-61CC-4603-A589-7422A47A8E4A}"/>
+    </a:ext>
+  </a:extLst>
 </a:theme>
 </file>